--- a/group2-fintech/Group2-Kickoff-Deck.pptx
+++ b/group2-fintech/Group2-Kickoff-Deck.pptx
@@ -7971,7 +7971,7 @@
                 <a:ea typeface="Calibri" pitchFamily="34" charset="-122"/>
                 <a:cs typeface="Calibri" pitchFamily="34" charset="-120"/>
               </a:rPr>
-              <a:t>verifyme-api-contract.md (+ mock server from facilitator)</a:t>
+              <a:t>verifyme-api-contract.md (+ mock server in your folder)</a:t>
             </a:r>
             <a:endParaRPr lang="en-US" sz="1100" dirty="0"/>
           </a:p>
